--- a/slides/tracking-docs-that-dont-suck.pptx
+++ b/slides/tracking-docs-that-dont-suck.pptx
@@ -1062,7 +1062,7 @@
           <a:lstStyle/>
           <a:p>
             <a:r>
-              <a:t>Switch to the demo. See DEMO_SCRIPT.md.</a:t>
+              <a:t>Switch to the demo. See README.md.</a:t>
             </a:r>
           </a:p>
         </p:txBody>
